--- a/テキストエディタ.pptx
+++ b/テキストエディタ.pptx
@@ -7841,7 +7841,7 @@
           <a:p>
             <a:fld id="{B176FF22-B1CA-4671-AC40-D6AD1168A308}" type="datetimeFigureOut">
               <a:rPr kumimoji="1" lang="ja-JP" altLang="en-US" smtClean="0"/>
-              <a:t>2025/3/4</a:t>
+              <a:t>2025/3/16</a:t>
             </a:fld>
             <a:endParaRPr kumimoji="1" lang="ja-JP" altLang="en-US"/>
           </a:p>
@@ -8271,7 +8271,7 @@
           <a:p>
             <a:fld id="{2ABC02D7-CBD1-4D33-B166-78A898DF0F76}" type="datetimeFigureOut">
               <a:rPr kumimoji="1" lang="ja-JP" altLang="en-US" smtClean="0"/>
-              <a:t>2025/3/4</a:t>
+              <a:t>2025/3/16</a:t>
             </a:fld>
             <a:endParaRPr kumimoji="1" lang="ja-JP" altLang="en-US"/>
           </a:p>
@@ -8473,7 +8473,7 @@
           <a:p>
             <a:fld id="{2ABC02D7-CBD1-4D33-B166-78A898DF0F76}" type="datetimeFigureOut">
               <a:rPr kumimoji="1" lang="ja-JP" altLang="en-US" smtClean="0"/>
-              <a:t>2025/3/4</a:t>
+              <a:t>2025/3/16</a:t>
             </a:fld>
             <a:endParaRPr kumimoji="1" lang="ja-JP" altLang="en-US"/>
           </a:p>
@@ -8685,7 +8685,7 @@
           <a:p>
             <a:fld id="{2ABC02D7-CBD1-4D33-B166-78A898DF0F76}" type="datetimeFigureOut">
               <a:rPr kumimoji="1" lang="ja-JP" altLang="en-US" smtClean="0"/>
-              <a:t>2025/3/4</a:t>
+              <a:t>2025/3/16</a:t>
             </a:fld>
             <a:endParaRPr kumimoji="1" lang="ja-JP" altLang="en-US"/>
           </a:p>
@@ -8918,7 +8918,7 @@
           <a:p>
             <a:fld id="{2ABC02D7-CBD1-4D33-B166-78A898DF0F76}" type="datetimeFigureOut">
               <a:rPr kumimoji="1" lang="ja-JP" altLang="en-US" smtClean="0"/>
-              <a:t>2025/3/4</a:t>
+              <a:t>2025/3/16</a:t>
             </a:fld>
             <a:endParaRPr kumimoji="1" lang="ja-JP" altLang="en-US"/>
           </a:p>
@@ -9164,7 +9164,7 @@
           <a:p>
             <a:fld id="{2ABC02D7-CBD1-4D33-B166-78A898DF0F76}" type="datetimeFigureOut">
               <a:rPr kumimoji="1" lang="ja-JP" altLang="en-US" smtClean="0"/>
-              <a:t>2025/3/4</a:t>
+              <a:t>2025/3/16</a:t>
             </a:fld>
             <a:endParaRPr kumimoji="1" lang="ja-JP" altLang="en-US"/>
           </a:p>
@@ -9460,7 +9460,7 @@
           <a:p>
             <a:fld id="{2ABC02D7-CBD1-4D33-B166-78A898DF0F76}" type="datetimeFigureOut">
               <a:rPr kumimoji="1" lang="ja-JP" altLang="en-US" smtClean="0"/>
-              <a:t>2025/3/4</a:t>
+              <a:t>2025/3/16</a:t>
             </a:fld>
             <a:endParaRPr kumimoji="1" lang="ja-JP" altLang="en-US"/>
           </a:p>
@@ -9891,7 +9891,7 @@
           <a:p>
             <a:fld id="{2ABC02D7-CBD1-4D33-B166-78A898DF0F76}" type="datetimeFigureOut">
               <a:rPr kumimoji="1" lang="ja-JP" altLang="en-US" smtClean="0"/>
-              <a:t>2025/3/4</a:t>
+              <a:t>2025/3/16</a:t>
             </a:fld>
             <a:endParaRPr kumimoji="1" lang="ja-JP" altLang="en-US"/>
           </a:p>
@@ -10009,7 +10009,7 @@
           <a:p>
             <a:fld id="{2ABC02D7-CBD1-4D33-B166-78A898DF0F76}" type="datetimeFigureOut">
               <a:rPr kumimoji="1" lang="ja-JP" altLang="en-US" smtClean="0"/>
-              <a:t>2025/3/4</a:t>
+              <a:t>2025/3/16</a:t>
             </a:fld>
             <a:endParaRPr kumimoji="1" lang="ja-JP" altLang="en-US"/>
           </a:p>
@@ -10104,7 +10104,7 @@
           <a:p>
             <a:fld id="{2ABC02D7-CBD1-4D33-B166-78A898DF0F76}" type="datetimeFigureOut">
               <a:rPr kumimoji="1" lang="ja-JP" altLang="en-US" smtClean="0"/>
-              <a:t>2025/3/4</a:t>
+              <a:t>2025/3/16</a:t>
             </a:fld>
             <a:endParaRPr kumimoji="1" lang="ja-JP" altLang="en-US"/>
           </a:p>
@@ -10413,7 +10413,7 @@
           <a:p>
             <a:fld id="{2ABC02D7-CBD1-4D33-B166-78A898DF0F76}" type="datetimeFigureOut">
               <a:rPr kumimoji="1" lang="ja-JP" altLang="en-US" smtClean="0"/>
-              <a:t>2025/3/4</a:t>
+              <a:t>2025/3/16</a:t>
             </a:fld>
             <a:endParaRPr kumimoji="1" lang="ja-JP" altLang="en-US"/>
           </a:p>
@@ -10670,7 +10670,7 @@
           <a:p>
             <a:fld id="{2ABC02D7-CBD1-4D33-B166-78A898DF0F76}" type="datetimeFigureOut">
               <a:rPr kumimoji="1" lang="ja-JP" altLang="en-US" smtClean="0"/>
-              <a:t>2025/3/4</a:t>
+              <a:t>2025/3/16</a:t>
             </a:fld>
             <a:endParaRPr kumimoji="1" lang="ja-JP" altLang="en-US"/>
           </a:p>
@@ -10915,7 +10915,7 @@
           <a:p>
             <a:fld id="{2ABC02D7-CBD1-4D33-B166-78A898DF0F76}" type="datetimeFigureOut">
               <a:rPr kumimoji="1" lang="ja-JP" altLang="en-US" smtClean="0"/>
-              <a:t>2025/3/4</a:t>
+              <a:t>2025/3/16</a:t>
             </a:fld>
             <a:endParaRPr kumimoji="1" lang="ja-JP" altLang="en-US"/>
           </a:p>

--- a/テキストエディタ.pptx
+++ b/テキストエディタ.pptx
@@ -7841,7 +7841,7 @@
           <a:p>
             <a:fld id="{B176FF22-B1CA-4671-AC40-D6AD1168A308}" type="datetimeFigureOut">
               <a:rPr kumimoji="1" lang="ja-JP" altLang="en-US" smtClean="0"/>
-              <a:t>2025/3/16</a:t>
+              <a:t>2025/9/27</a:t>
             </a:fld>
             <a:endParaRPr kumimoji="1" lang="ja-JP" altLang="en-US"/>
           </a:p>
@@ -8271,7 +8271,7 @@
           <a:p>
             <a:fld id="{2ABC02D7-CBD1-4D33-B166-78A898DF0F76}" type="datetimeFigureOut">
               <a:rPr kumimoji="1" lang="ja-JP" altLang="en-US" smtClean="0"/>
-              <a:t>2025/3/16</a:t>
+              <a:t>2025/9/27</a:t>
             </a:fld>
             <a:endParaRPr kumimoji="1" lang="ja-JP" altLang="en-US"/>
           </a:p>
@@ -8473,7 +8473,7 @@
           <a:p>
             <a:fld id="{2ABC02D7-CBD1-4D33-B166-78A898DF0F76}" type="datetimeFigureOut">
               <a:rPr kumimoji="1" lang="ja-JP" altLang="en-US" smtClean="0"/>
-              <a:t>2025/3/16</a:t>
+              <a:t>2025/9/27</a:t>
             </a:fld>
             <a:endParaRPr kumimoji="1" lang="ja-JP" altLang="en-US"/>
           </a:p>
@@ -8685,7 +8685,7 @@
           <a:p>
             <a:fld id="{2ABC02D7-CBD1-4D33-B166-78A898DF0F76}" type="datetimeFigureOut">
               <a:rPr kumimoji="1" lang="ja-JP" altLang="en-US" smtClean="0"/>
-              <a:t>2025/3/16</a:t>
+              <a:t>2025/9/27</a:t>
             </a:fld>
             <a:endParaRPr kumimoji="1" lang="ja-JP" altLang="en-US"/>
           </a:p>
@@ -8918,7 +8918,7 @@
           <a:p>
             <a:fld id="{2ABC02D7-CBD1-4D33-B166-78A898DF0F76}" type="datetimeFigureOut">
               <a:rPr kumimoji="1" lang="ja-JP" altLang="en-US" smtClean="0"/>
-              <a:t>2025/3/16</a:t>
+              <a:t>2025/9/27</a:t>
             </a:fld>
             <a:endParaRPr kumimoji="1" lang="ja-JP" altLang="en-US"/>
           </a:p>
@@ -9164,7 +9164,7 @@
           <a:p>
             <a:fld id="{2ABC02D7-CBD1-4D33-B166-78A898DF0F76}" type="datetimeFigureOut">
               <a:rPr kumimoji="1" lang="ja-JP" altLang="en-US" smtClean="0"/>
-              <a:t>2025/3/16</a:t>
+              <a:t>2025/9/27</a:t>
             </a:fld>
             <a:endParaRPr kumimoji="1" lang="ja-JP" altLang="en-US"/>
           </a:p>
@@ -9460,7 +9460,7 @@
           <a:p>
             <a:fld id="{2ABC02D7-CBD1-4D33-B166-78A898DF0F76}" type="datetimeFigureOut">
               <a:rPr kumimoji="1" lang="ja-JP" altLang="en-US" smtClean="0"/>
-              <a:t>2025/3/16</a:t>
+              <a:t>2025/9/27</a:t>
             </a:fld>
             <a:endParaRPr kumimoji="1" lang="ja-JP" altLang="en-US"/>
           </a:p>
@@ -9891,7 +9891,7 @@
           <a:p>
             <a:fld id="{2ABC02D7-CBD1-4D33-B166-78A898DF0F76}" type="datetimeFigureOut">
               <a:rPr kumimoji="1" lang="ja-JP" altLang="en-US" smtClean="0"/>
-              <a:t>2025/3/16</a:t>
+              <a:t>2025/9/27</a:t>
             </a:fld>
             <a:endParaRPr kumimoji="1" lang="ja-JP" altLang="en-US"/>
           </a:p>
@@ -10009,7 +10009,7 @@
           <a:p>
             <a:fld id="{2ABC02D7-CBD1-4D33-B166-78A898DF0F76}" type="datetimeFigureOut">
               <a:rPr kumimoji="1" lang="ja-JP" altLang="en-US" smtClean="0"/>
-              <a:t>2025/3/16</a:t>
+              <a:t>2025/9/27</a:t>
             </a:fld>
             <a:endParaRPr kumimoji="1" lang="ja-JP" altLang="en-US"/>
           </a:p>
@@ -10104,7 +10104,7 @@
           <a:p>
             <a:fld id="{2ABC02D7-CBD1-4D33-B166-78A898DF0F76}" type="datetimeFigureOut">
               <a:rPr kumimoji="1" lang="ja-JP" altLang="en-US" smtClean="0"/>
-              <a:t>2025/3/16</a:t>
+              <a:t>2025/9/27</a:t>
             </a:fld>
             <a:endParaRPr kumimoji="1" lang="ja-JP" altLang="en-US"/>
           </a:p>
@@ -10413,7 +10413,7 @@
           <a:p>
             <a:fld id="{2ABC02D7-CBD1-4D33-B166-78A898DF0F76}" type="datetimeFigureOut">
               <a:rPr kumimoji="1" lang="ja-JP" altLang="en-US" smtClean="0"/>
-              <a:t>2025/3/16</a:t>
+              <a:t>2025/9/27</a:t>
             </a:fld>
             <a:endParaRPr kumimoji="1" lang="ja-JP" altLang="en-US"/>
           </a:p>
@@ -10670,7 +10670,7 @@
           <a:p>
             <a:fld id="{2ABC02D7-CBD1-4D33-B166-78A898DF0F76}" type="datetimeFigureOut">
               <a:rPr kumimoji="1" lang="ja-JP" altLang="en-US" smtClean="0"/>
-              <a:t>2025/3/16</a:t>
+              <a:t>2025/9/27</a:t>
             </a:fld>
             <a:endParaRPr kumimoji="1" lang="ja-JP" altLang="en-US"/>
           </a:p>
@@ -10915,7 +10915,7 @@
           <a:p>
             <a:fld id="{2ABC02D7-CBD1-4D33-B166-78A898DF0F76}" type="datetimeFigureOut">
               <a:rPr kumimoji="1" lang="ja-JP" altLang="en-US" smtClean="0"/>
-              <a:t>2025/3/16</a:t>
+              <a:t>2025/9/27</a:t>
             </a:fld>
             <a:endParaRPr kumimoji="1" lang="ja-JP" altLang="en-US"/>
           </a:p>
@@ -16541,7 +16541,7 @@
         <p:spPr>
           <a:xfrm>
             <a:off x="634481" y="4888669"/>
-            <a:ext cx="9958880" cy="830997"/>
+            <a:ext cx="10217797" cy="707886"/>
           </a:xfrm>
           <a:prstGeom prst="rect">
             <a:avLst/>
@@ -16554,23 +16554,21 @@
           </a:bodyPr>
           <a:lstStyle/>
           <a:p>
-            <a:pPr algn="l"/>
-            <a:r>
-              <a:rPr kumimoji="1" lang="en-US" altLang="ja-JP" sz="2400" dirty="0">
+            <a:r>
+              <a:rPr kumimoji="1" lang="en-US" altLang="ja-JP" sz="2000" dirty="0">
                 <a:latin typeface="メイリオ" panose="020B0604030504040204" pitchFamily="50" charset="-128"/>
                 <a:ea typeface="メイリオ" panose="020B0604030504040204" pitchFamily="50" charset="-128"/>
                 <a:hlinkClick r:id="rId2"/>
               </a:rPr>
-              <a:t>https://github.com/uhokuto/python17-text_editor-programming</a:t>
-            </a:r>
-            <a:endParaRPr kumimoji="1" lang="en-US" altLang="ja-JP" sz="2400" dirty="0">
+              <a:t>https://github.com/ueharaLab/pyhton17_text_editor/blob/main/text_editor.md</a:t>
+            </a:r>
+            <a:endParaRPr kumimoji="1" lang="en-US" altLang="ja-JP" sz="2000" dirty="0">
               <a:latin typeface="メイリオ" panose="020B0604030504040204" pitchFamily="50" charset="-128"/>
               <a:ea typeface="メイリオ" panose="020B0604030504040204" pitchFamily="50" charset="-128"/>
             </a:endParaRPr>
           </a:p>
           <a:p>
-            <a:pPr algn="l"/>
-            <a:endParaRPr kumimoji="1" lang="ja-JP" altLang="en-US" sz="2400" dirty="0">
+            <a:endParaRPr kumimoji="1" lang="ja-JP" altLang="en-US" sz="2000" dirty="0">
               <a:latin typeface="メイリオ" panose="020B0604030504040204" pitchFamily="50" charset="-128"/>
               <a:ea typeface="メイリオ" panose="020B0604030504040204" pitchFamily="50" charset="-128"/>
             </a:endParaRPr>
